--- a/Shout to the Lord.pptx
+++ b/Shout to the Lord.pptx
@@ -263,7 +263,7 @@
           <a:p>
             <a:fld id="{E759A0DE-F190-5444-87AC-4719D5F20D15}" type="datetimeFigureOut">
               <a:rPr lang="en-US" smtClean="0"/>
-              <a:t>10/8/26</a:t>
+              <a:t>10/18/26</a:t>
             </a:fld>
             <a:endParaRPr lang="en-US"/>
           </a:p>
@@ -433,7 +433,7 @@
           <a:p>
             <a:fld id="{E759A0DE-F190-5444-87AC-4719D5F20D15}" type="datetimeFigureOut">
               <a:rPr lang="en-US" smtClean="0"/>
-              <a:t>10/8/26</a:t>
+              <a:t>10/18/26</a:t>
             </a:fld>
             <a:endParaRPr lang="en-US"/>
           </a:p>
@@ -613,7 +613,7 @@
           <a:p>
             <a:fld id="{E759A0DE-F190-5444-87AC-4719D5F20D15}" type="datetimeFigureOut">
               <a:rPr lang="en-US" smtClean="0"/>
-              <a:t>10/8/26</a:t>
+              <a:t>10/18/26</a:t>
             </a:fld>
             <a:endParaRPr lang="en-US"/>
           </a:p>
@@ -783,7 +783,7 @@
           <a:p>
             <a:fld id="{E759A0DE-F190-5444-87AC-4719D5F20D15}" type="datetimeFigureOut">
               <a:rPr lang="en-US" smtClean="0"/>
-              <a:t>10/8/26</a:t>
+              <a:t>10/18/26</a:t>
             </a:fld>
             <a:endParaRPr lang="en-US"/>
           </a:p>
@@ -1029,7 +1029,7 @@
           <a:p>
             <a:fld id="{E759A0DE-F190-5444-87AC-4719D5F20D15}" type="datetimeFigureOut">
               <a:rPr lang="en-US" smtClean="0"/>
-              <a:t>10/8/26</a:t>
+              <a:t>10/18/26</a:t>
             </a:fld>
             <a:endParaRPr lang="en-US"/>
           </a:p>
@@ -1261,7 +1261,7 @@
           <a:p>
             <a:fld id="{E759A0DE-F190-5444-87AC-4719D5F20D15}" type="datetimeFigureOut">
               <a:rPr lang="en-US" smtClean="0"/>
-              <a:t>10/8/26</a:t>
+              <a:t>10/18/26</a:t>
             </a:fld>
             <a:endParaRPr lang="en-US"/>
           </a:p>
@@ -1628,7 +1628,7 @@
           <a:p>
             <a:fld id="{E759A0DE-F190-5444-87AC-4719D5F20D15}" type="datetimeFigureOut">
               <a:rPr lang="en-US" smtClean="0"/>
-              <a:t>10/8/26</a:t>
+              <a:t>10/18/26</a:t>
             </a:fld>
             <a:endParaRPr lang="en-US"/>
           </a:p>
@@ -1746,7 +1746,7 @@
           <a:p>
             <a:fld id="{E759A0DE-F190-5444-87AC-4719D5F20D15}" type="datetimeFigureOut">
               <a:rPr lang="en-US" smtClean="0"/>
-              <a:t>10/8/26</a:t>
+              <a:t>10/18/26</a:t>
             </a:fld>
             <a:endParaRPr lang="en-US"/>
           </a:p>
@@ -1841,7 +1841,7 @@
           <a:p>
             <a:fld id="{E759A0DE-F190-5444-87AC-4719D5F20D15}" type="datetimeFigureOut">
               <a:rPr lang="en-US" smtClean="0"/>
-              <a:t>10/8/26</a:t>
+              <a:t>10/18/26</a:t>
             </a:fld>
             <a:endParaRPr lang="en-US"/>
           </a:p>
@@ -2118,7 +2118,7 @@
           <a:p>
             <a:fld id="{E759A0DE-F190-5444-87AC-4719D5F20D15}" type="datetimeFigureOut">
               <a:rPr lang="en-US" smtClean="0"/>
-              <a:t>10/8/26</a:t>
+              <a:t>10/18/26</a:t>
             </a:fld>
             <a:endParaRPr lang="en-US"/>
           </a:p>
@@ -2375,7 +2375,7 @@
           <a:p>
             <a:fld id="{E759A0DE-F190-5444-87AC-4719D5F20D15}" type="datetimeFigureOut">
               <a:rPr lang="en-US" smtClean="0"/>
-              <a:t>10/8/26</a:t>
+              <a:t>10/18/26</a:t>
             </a:fld>
             <a:endParaRPr lang="en-US"/>
           </a:p>
@@ -2588,7 +2588,7 @@
           <a:p>
             <a:fld id="{E759A0DE-F190-5444-87AC-4719D5F20D15}" type="datetimeFigureOut">
               <a:rPr lang="en-US" smtClean="0"/>
-              <a:t>10/8/26</a:t>
+              <a:t>10/18/26</a:t>
             </a:fld>
             <a:endParaRPr lang="en-US"/>
           </a:p>
@@ -3666,9 +3666,7 @@
     <p:bg>
       <p:bgPr>
         <a:solidFill>
-          <a:schemeClr val="bg2">
-            <a:lumMod val="10000"/>
-          </a:schemeClr>
+          <a:schemeClr val="tx1"/>
         </a:solidFill>
         <a:effectLst/>
       </p:bgPr>
@@ -3807,9 +3805,7 @@
     <p:bg>
       <p:bgPr>
         <a:solidFill>
-          <a:schemeClr val="bg2">
-            <a:lumMod val="10000"/>
-          </a:schemeClr>
+          <a:schemeClr val="tx1"/>
         </a:solidFill>
         <a:effectLst/>
       </p:bgPr>
@@ -3948,9 +3944,7 @@
     <p:bg>
       <p:bgPr>
         <a:solidFill>
-          <a:schemeClr val="bg2">
-            <a:lumMod val="10000"/>
-          </a:schemeClr>
+          <a:schemeClr val="tx1"/>
         </a:solidFill>
         <a:effectLst/>
       </p:bgPr>
@@ -4084,9 +4078,7 @@
     <p:bg>
       <p:bgPr>
         <a:solidFill>
-          <a:schemeClr val="bg2">
-            <a:lumMod val="10000"/>
-          </a:schemeClr>
+          <a:schemeClr val="tx1"/>
         </a:solidFill>
         <a:effectLst/>
       </p:bgPr>
@@ -4178,7 +4170,7 @@
                 <a:latin typeface="Avenir Medium" panose="02000503020000020003" pitchFamily="2" charset="0"/>
                 <a:ea typeface="Bodoni Ornaments" pitchFamily="2" charset="0"/>
               </a:rPr>
-              <a:t>Nothing compares to the promise I have in You</a:t>
+              <a:t>Nothing compares to the promise I have in</a:t>
             </a:r>
           </a:p>
           <a:p>
@@ -4211,9 +4203,7 @@
     <p:bg>
       <p:bgPr>
         <a:solidFill>
-          <a:schemeClr val="bg2">
-            <a:lumMod val="10000"/>
-          </a:schemeClr>
+          <a:schemeClr val="tx1"/>
         </a:solidFill>
         <a:effectLst/>
       </p:bgPr>
@@ -4352,9 +4342,7 @@
     <p:bg>
       <p:bgPr>
         <a:solidFill>
-          <a:schemeClr val="bg2">
-            <a:lumMod val="10000"/>
-          </a:schemeClr>
+          <a:schemeClr val="tx1"/>
         </a:solidFill>
         <a:effectLst/>
       </p:bgPr>
@@ -4620,9 +4608,7 @@
     <p:bg>
       <p:bgPr>
         <a:solidFill>
-          <a:schemeClr val="bg2">
-            <a:lumMod val="10000"/>
-          </a:schemeClr>
+          <a:schemeClr val="tx1"/>
         </a:solidFill>
         <a:effectLst/>
       </p:bgPr>
@@ -4756,9 +4742,7 @@
     <p:bg>
       <p:bgPr>
         <a:solidFill>
-          <a:schemeClr val="bg2">
-            <a:lumMod val="10000"/>
-          </a:schemeClr>
+          <a:schemeClr val="tx1"/>
         </a:solidFill>
         <a:effectLst/>
       </p:bgPr>
